--- a/catalog/samples/cycle.pptx
+++ b/catalog/samples/cycle.pptx
@@ -1422,7 +1422,7 @@
           </a:p>
           <a:p>
             <a:r>
-              <a:t>  "template_sha256": "66eda2a6f27f107d4292ad11c3752c48a4c5046faff615ae9aa6033d59ab7326"</a:t>
+              <a:t>  "template_sha256": "74af576588cc023a67d2c888055455055a5acb7161e895b49a69fc7a48ee05d7"</a:t>
             </a:r>
           </a:p>
           <a:p>
